--- a/Reporte 191026.pptx
+++ b/Reporte 191026.pptx
@@ -5,7 +5,7 @@
     <p:sldMasterId id="2147483672" r:id="rId1"/>
   </p:sldMasterIdLst>
   <p:notesMasterIdLst>
-    <p:notesMasterId r:id="rId18"/>
+    <p:notesMasterId r:id="rId19"/>
   </p:notesMasterIdLst>
   <p:sldIdLst>
     <p:sldId id="350" r:id="rId2"/>
@@ -13,32 +13,33 @@
     <p:sldId id="408" r:id="rId4"/>
     <p:sldId id="405" r:id="rId5"/>
     <p:sldId id="406" r:id="rId6"/>
-    <p:sldId id="394" r:id="rId7"/>
-    <p:sldId id="395" r:id="rId8"/>
-    <p:sldId id="396" r:id="rId9"/>
-    <p:sldId id="403" r:id="rId10"/>
-    <p:sldId id="388" r:id="rId11"/>
-    <p:sldId id="351" r:id="rId12"/>
-    <p:sldId id="361" r:id="rId13"/>
-    <p:sldId id="412" r:id="rId14"/>
-    <p:sldId id="414" r:id="rId15"/>
-    <p:sldId id="413" r:id="rId16"/>
-    <p:sldId id="280" r:id="rId17"/>
+    <p:sldId id="415" r:id="rId7"/>
+    <p:sldId id="394" r:id="rId8"/>
+    <p:sldId id="395" r:id="rId9"/>
+    <p:sldId id="396" r:id="rId10"/>
+    <p:sldId id="403" r:id="rId11"/>
+    <p:sldId id="388" r:id="rId12"/>
+    <p:sldId id="351" r:id="rId13"/>
+    <p:sldId id="361" r:id="rId14"/>
+    <p:sldId id="412" r:id="rId15"/>
+    <p:sldId id="414" r:id="rId16"/>
+    <p:sldId id="413" r:id="rId17"/>
+    <p:sldId id="280" r:id="rId18"/>
   </p:sldIdLst>
   <p:sldSz cx="9144000" cy="5143500" type="screen16x9"/>
   <p:notesSz cx="6858000" cy="9144000"/>
   <p:embeddedFontLst>
     <p:embeddedFont>
       <p:font typeface="Montserrat" panose="00000500000000000000" pitchFamily="2" charset="0"/>
-      <p:regular r:id="rId19"/>
-      <p:bold r:id="rId20"/>
-      <p:italic r:id="rId21"/>
-      <p:boldItalic r:id="rId22"/>
+      <p:regular r:id="rId20"/>
+      <p:bold r:id="rId21"/>
+      <p:italic r:id="rId22"/>
+      <p:boldItalic r:id="rId23"/>
     </p:embeddedFont>
     <p:embeddedFont>
       <p:font typeface="Montserrat Black" panose="00000A00000000000000" pitchFamily="2" charset="0"/>
-      <p:bold r:id="rId23"/>
-      <p:boldItalic r:id="rId24"/>
+      <p:bold r:id="rId24"/>
+      <p:boldItalic r:id="rId25"/>
     </p:embeddedFont>
   </p:embeddedFontLst>
   <p:defaultTextStyle>
@@ -1085,6 +1086,90 @@
         <p:cNvPr id="1" name="">
           <a:extLst>
             <a:ext uri="{FF2B5EF4-FFF2-40B4-BE49-F238E27FC236}">
+              <a16:creationId xmlns:a16="http://schemas.microsoft.com/office/drawing/2014/main" id="{52D19231-8BFD-F3AB-7037-7A16B159213B}"/>
+            </a:ext>
+          </a:extLst>
+        </p:cNvPr>
+        <p:cNvGrpSpPr/>
+        <p:nvPr/>
+      </p:nvGrpSpPr>
+      <p:grpSpPr>
+        <a:xfrm>
+          <a:off x="0" y="0"/>
+          <a:ext cx="0" cy="0"/>
+          <a:chOff x="0" y="0"/>
+          <a:chExt cx="0" cy="0"/>
+        </a:xfrm>
+      </p:grpSpPr>
+      <p:sp>
+        <p:nvSpPr>
+          <p:cNvPr id="2" name="Marcador de imagen de diapositiva 1">
+            <a:extLst>
+              <a:ext uri="{FF2B5EF4-FFF2-40B4-BE49-F238E27FC236}">
+                <a16:creationId xmlns:a16="http://schemas.microsoft.com/office/drawing/2014/main" id="{5FC8ABDF-9C83-E3B5-B8BE-7B70BD5DC97F}"/>
+              </a:ext>
+            </a:extLst>
+          </p:cNvPr>
+          <p:cNvSpPr>
+            <a:spLocks noGrp="1" noRot="1" noChangeAspect="1"/>
+          </p:cNvSpPr>
+          <p:nvPr>
+            <p:ph type="sldImg"/>
+          </p:nvPr>
+        </p:nvSpPr>
+        <p:spPr>
+          <a:xfrm>
+            <a:off x="381000" y="685800"/>
+            <a:ext cx="6096000" cy="3429000"/>
+          </a:xfrm>
+        </p:spPr>
+      </p:sp>
+      <p:sp>
+        <p:nvSpPr>
+          <p:cNvPr id="3" name="Marcador de notas 2">
+            <a:extLst>
+              <a:ext uri="{FF2B5EF4-FFF2-40B4-BE49-F238E27FC236}">
+                <a16:creationId xmlns:a16="http://schemas.microsoft.com/office/drawing/2014/main" id="{738BC9C2-ADC7-4D30-0166-A7C104A38C2B}"/>
+              </a:ext>
+            </a:extLst>
+          </p:cNvPr>
+          <p:cNvSpPr>
+            <a:spLocks noGrp="1"/>
+          </p:cNvSpPr>
+          <p:nvPr>
+            <p:ph type="body" idx="1"/>
+          </p:nvPr>
+        </p:nvSpPr>
+        <p:spPr/>
+        <p:txBody>
+          <a:bodyPr/>
+          <a:lstStyle/>
+          <a:p>
+            <a:endParaRPr lang="es-MX" dirty="0"/>
+          </a:p>
+        </p:txBody>
+      </p:sp>
+    </p:spTree>
+    <p:extLst>
+      <p:ext uri="{BB962C8B-B14F-4D97-AF65-F5344CB8AC3E}">
+        <p14:creationId xmlns:p14="http://schemas.microsoft.com/office/powerpoint/2010/main" val="1873734797"/>
+      </p:ext>
+    </p:extLst>
+  </p:cSld>
+  <p:clrMapOvr>
+    <a:masterClrMapping/>
+  </p:clrMapOvr>
+</p:notes>
+</file>
+
+<file path=ppt/notesSlides/notesSlide6.xml><?xml version="1.0" encoding="utf-8"?>
+<p:notes xmlns:a="http://schemas.openxmlformats.org/drawingml/2006/main" xmlns:r="http://schemas.openxmlformats.org/officeDocument/2006/relationships" xmlns:p="http://schemas.openxmlformats.org/presentationml/2006/main">
+  <p:cSld>
+    <p:spTree>
+      <p:nvGrpSpPr>
+        <p:cNvPr id="1" name="">
+          <a:extLst>
+            <a:ext uri="{FF2B5EF4-FFF2-40B4-BE49-F238E27FC236}">
               <a16:creationId xmlns:a16="http://schemas.microsoft.com/office/drawing/2014/main" id="{357567EE-3B4E-8C48-2AAD-0C70B0A7FC91}"/>
             </a:ext>
           </a:extLst>
@@ -1161,7 +1246,7 @@
 </p:notes>
 </file>
 
-<file path=ppt/notesSlides/notesSlide6.xml><?xml version="1.0" encoding="utf-8"?>
+<file path=ppt/notesSlides/notesSlide7.xml><?xml version="1.0" encoding="utf-8"?>
 <p:notes xmlns:a="http://schemas.openxmlformats.org/drawingml/2006/main" xmlns:r="http://schemas.openxmlformats.org/officeDocument/2006/relationships" xmlns:p="http://schemas.openxmlformats.org/presentationml/2006/main" showMasterSp="0" showMasterPhAnim="0">
   <p:cSld>
     <p:spTree>
@@ -6427,7 +6512,7 @@
                   <a:srgbClr val="D8AB72"/>
                 </a:solidFill>
               </a:rPr>
-              <a:t>16</a:t>
+              <a:t>19</a:t>
             </a:r>
             <a:r>
               <a:rPr kumimoji="0" lang="es-MX" sz="1600" b="0" i="0" u="none" strike="noStrike" kern="0" cap="none" spc="0" normalizeH="0" baseline="0" noProof="0" dirty="0">
@@ -6504,6 +6589,132 @@
 </file>
 
 <file path=ppt/slides/slide10.xml><?xml version="1.0" encoding="utf-8"?>
+<p:sld xmlns:a="http://schemas.openxmlformats.org/drawingml/2006/main" xmlns:r="http://schemas.openxmlformats.org/officeDocument/2006/relationships" xmlns:p="http://schemas.openxmlformats.org/presentationml/2006/main">
+  <p:cSld>
+    <p:bg>
+      <p:bgPr>
+        <a:solidFill>
+          <a:srgbClr val="FAFAFA"/>
+        </a:solidFill>
+        <a:effectLst/>
+      </p:bgPr>
+    </p:bg>
+    <p:spTree>
+      <p:nvGrpSpPr>
+        <p:cNvPr id="1" name="">
+          <a:extLst>
+            <a:ext uri="{FF2B5EF4-FFF2-40B4-BE49-F238E27FC236}">
+              <a16:creationId xmlns:a16="http://schemas.microsoft.com/office/drawing/2014/main" id="{93B6DC8C-E619-F67B-9048-4615CF198885}"/>
+            </a:ext>
+          </a:extLst>
+        </p:cNvPr>
+        <p:cNvGrpSpPr/>
+        <p:nvPr/>
+      </p:nvGrpSpPr>
+      <p:grpSpPr>
+        <a:xfrm>
+          <a:off x="0" y="0"/>
+          <a:ext cx="0" cy="0"/>
+          <a:chOff x="0" y="0"/>
+          <a:chExt cx="0" cy="0"/>
+        </a:xfrm>
+      </p:grpSpPr>
+      <p:sp>
+        <p:nvSpPr>
+          <p:cNvPr id="7" name="CuadroTexto 6">
+            <a:extLst>
+              <a:ext uri="{FF2B5EF4-FFF2-40B4-BE49-F238E27FC236}">
+                <a16:creationId xmlns:a16="http://schemas.microsoft.com/office/drawing/2014/main" id="{C46A5360-EC76-283F-42C4-C3D1585636DD}"/>
+              </a:ext>
+            </a:extLst>
+          </p:cNvPr>
+          <p:cNvSpPr txBox="1"/>
+          <p:nvPr/>
+        </p:nvSpPr>
+        <p:spPr>
+          <a:xfrm>
+            <a:off x="908175" y="152426"/>
+            <a:ext cx="7254625" cy="369332"/>
+          </a:xfrm>
+          <a:prstGeom prst="rect">
+            <a:avLst/>
+          </a:prstGeom>
+          <a:noFill/>
+        </p:spPr>
+        <p:txBody>
+          <a:bodyPr wrap="square">
+            <a:spAutoFit/>
+          </a:bodyPr>
+          <a:lstStyle/>
+          <a:p>
+            <a:pPr algn="ctr">
+              <a:buNone/>
+            </a:pPr>
+            <a:r>
+              <a:rPr lang="es-MX" sz="1800" b="1" i="0" dirty="0">
+                <a:solidFill>
+                  <a:srgbClr val="000000"/>
+                </a:solidFill>
+                <a:effectLst/>
+                <a:latin typeface="Montserrat" pitchFamily="2" charset="0"/>
+              </a:rPr>
+              <a:t>Detalle de Notas en primeras planas</a:t>
+            </a:r>
+          </a:p>
+        </p:txBody>
+      </p:sp>
+      <p:sp>
+        <p:nvSpPr>
+          <p:cNvPr id="6" name="CuadroTexto 5">
+            <a:extLst>
+              <a:ext uri="{FF2B5EF4-FFF2-40B4-BE49-F238E27FC236}">
+                <a16:creationId xmlns:a16="http://schemas.microsoft.com/office/drawing/2014/main" id="{16C89079-3408-10CE-4AB0-4A10750AB576}"/>
+              </a:ext>
+            </a:extLst>
+          </p:cNvPr>
+          <p:cNvSpPr txBox="1"/>
+          <p:nvPr/>
+        </p:nvSpPr>
+        <p:spPr>
+          <a:xfrm>
+            <a:off x="1360800" y="2289245"/>
+            <a:ext cx="6667200" cy="707886"/>
+          </a:xfrm>
+          <a:prstGeom prst="rect">
+            <a:avLst/>
+          </a:prstGeom>
+          <a:noFill/>
+        </p:spPr>
+        <p:txBody>
+          <a:bodyPr wrap="square" rtlCol="0">
+            <a:spAutoFit/>
+          </a:bodyPr>
+          <a:lstStyle/>
+          <a:p>
+            <a:pPr algn="ctr"/>
+            <a:r>
+              <a:rPr lang="es-MX" sz="2000" b="1" dirty="0">
+                <a:latin typeface="Montserrat" panose="00000500000000000000" pitchFamily="2" charset="0"/>
+              </a:rPr>
+              <a:t>No se registró información del gobernador en primeras planas</a:t>
+            </a:r>
+          </a:p>
+        </p:txBody>
+      </p:sp>
+    </p:spTree>
+    <p:extLst>
+      <p:ext uri="{BB962C8B-B14F-4D97-AF65-F5344CB8AC3E}">
+        <p14:creationId xmlns:p14="http://schemas.microsoft.com/office/powerpoint/2010/main" val="2442859157"/>
+      </p:ext>
+    </p:extLst>
+  </p:cSld>
+  <p:clrMapOvr>
+    <a:masterClrMapping/>
+  </p:clrMapOvr>
+</p:sld>
+</file>
+
+<file path=ppt/slides/slide11.xml><?xml version="1.0" encoding="utf-8"?>
 <p:sld xmlns:a="http://schemas.openxmlformats.org/drawingml/2006/main" xmlns:r="http://schemas.openxmlformats.org/officeDocument/2006/relationships" xmlns:p="http://schemas.openxmlformats.org/presentationml/2006/main">
   <p:cSld>
     <p:bg>
@@ -6615,7 +6826,7 @@
 </p:sld>
 </file>
 
-<file path=ppt/slides/slide11.xml><?xml version="1.0" encoding="utf-8"?>
+<file path=ppt/slides/slide12.xml><?xml version="1.0" encoding="utf-8"?>
 <p:sld xmlns:a="http://schemas.openxmlformats.org/drawingml/2006/main" xmlns:r="http://schemas.openxmlformats.org/officeDocument/2006/relationships" xmlns:p="http://schemas.openxmlformats.org/presentationml/2006/main">
   <p:cSld>
     <p:bg>
@@ -6721,7 +6932,7 @@
 </p:sld>
 </file>
 
-<file path=ppt/slides/slide12.xml><?xml version="1.0" encoding="utf-8"?>
+<file path=ppt/slides/slide13.xml><?xml version="1.0" encoding="utf-8"?>
 <p:sld xmlns:a="http://schemas.openxmlformats.org/drawingml/2006/main" xmlns:r="http://schemas.openxmlformats.org/officeDocument/2006/relationships" xmlns:p="http://schemas.openxmlformats.org/presentationml/2006/main">
   <p:cSld>
     <p:bg>
@@ -6827,7 +7038,7 @@
 </p:sld>
 </file>
 
-<file path=ppt/slides/slide13.xml><?xml version="1.0" encoding="utf-8"?>
+<file path=ppt/slides/slide14.xml><?xml version="1.0" encoding="utf-8"?>
 <p:sld xmlns:a="http://schemas.openxmlformats.org/drawingml/2006/main" xmlns:r="http://schemas.openxmlformats.org/officeDocument/2006/relationships" xmlns:p="http://schemas.openxmlformats.org/presentationml/2006/main">
   <p:cSld>
     <p:bg>
@@ -6933,7 +7144,7 @@
 </p:sld>
 </file>
 
-<file path=ppt/slides/slide14.xml><?xml version="1.0" encoding="utf-8"?>
+<file path=ppt/slides/slide15.xml><?xml version="1.0" encoding="utf-8"?>
 <p:sld xmlns:a="http://schemas.openxmlformats.org/drawingml/2006/main" xmlns:r="http://schemas.openxmlformats.org/officeDocument/2006/relationships" xmlns:p="http://schemas.openxmlformats.org/presentationml/2006/main">
   <p:cSld>
     <p:bg>
@@ -7045,7 +7256,7 @@
 </p:sld>
 </file>
 
-<file path=ppt/slides/slide15.xml><?xml version="1.0" encoding="utf-8"?>
+<file path=ppt/slides/slide16.xml><?xml version="1.0" encoding="utf-8"?>
 <p:sld xmlns:a="http://schemas.openxmlformats.org/drawingml/2006/main" xmlns:r="http://schemas.openxmlformats.org/officeDocument/2006/relationships" xmlns:p="http://schemas.openxmlformats.org/presentationml/2006/main">
   <p:cSld>
     <p:bg>
@@ -7165,7 +7376,7 @@
 </p:sld>
 </file>
 
-<file path=ppt/slides/slide16.xml><?xml version="1.0" encoding="utf-8"?>
+<file path=ppt/slides/slide17.xml><?xml version="1.0" encoding="utf-8"?>
 <p:sld xmlns:a="http://schemas.openxmlformats.org/drawingml/2006/main" xmlns:r="http://schemas.openxmlformats.org/officeDocument/2006/relationships" xmlns:p="http://schemas.openxmlformats.org/presentationml/2006/main">
   <p:cSld>
     <p:spTree>
@@ -7298,10 +7509,10 @@
       </p:sp>
       <p:pic>
         <p:nvPicPr>
-          <p:cNvPr id="3" name="Imagen 2">
+          <p:cNvPr id="4" name="Imagen 3">
             <a:extLst>
               <a:ext uri="{FF2B5EF4-FFF2-40B4-BE49-F238E27FC236}">
-                <a16:creationId xmlns:a16="http://schemas.microsoft.com/office/drawing/2014/main" id="{F705294D-0991-B074-6902-1C9E53EC29EE}"/>
+                <a16:creationId xmlns:a16="http://schemas.microsoft.com/office/drawing/2014/main" id="{F4A4E882-DDDA-C6BA-1F64-9DD80EC5744C}"/>
               </a:ext>
             </a:extLst>
           </p:cNvPr>
@@ -7318,8 +7529,8 @@
         </p:blipFill>
         <p:spPr>
           <a:xfrm>
-            <a:off x="0" y="856015"/>
-            <a:ext cx="9144000" cy="3431469"/>
+            <a:off x="0" y="923740"/>
+            <a:ext cx="9144000" cy="3438896"/>
           </a:xfrm>
           <a:prstGeom prst="rect">
             <a:avLst/>
@@ -7412,10 +7623,10 @@
       </p:sp>
       <p:pic>
         <p:nvPicPr>
-          <p:cNvPr id="3" name="Imagen 2">
+          <p:cNvPr id="4" name="Imagen 3">
             <a:extLst>
               <a:ext uri="{FF2B5EF4-FFF2-40B4-BE49-F238E27FC236}">
-                <a16:creationId xmlns:a16="http://schemas.microsoft.com/office/drawing/2014/main" id="{771E6D35-0A23-ACD5-9539-A0F5A465E541}"/>
+                <a16:creationId xmlns:a16="http://schemas.microsoft.com/office/drawing/2014/main" id="{F46C4A46-8594-224C-7518-FDF1A12C2FB3}"/>
               </a:ext>
             </a:extLst>
           </p:cNvPr>
@@ -7432,8 +7643,8 @@
         </p:blipFill>
         <p:spPr>
           <a:xfrm>
-            <a:off x="0" y="1399881"/>
-            <a:ext cx="9144000" cy="2486613"/>
+            <a:off x="0" y="1412931"/>
+            <a:ext cx="9144000" cy="2460513"/>
           </a:xfrm>
           <a:prstGeom prst="rect">
             <a:avLst/>
@@ -7526,10 +7737,10 @@
       </p:sp>
       <p:pic>
         <p:nvPicPr>
-          <p:cNvPr id="5" name="Imagen 4">
+          <p:cNvPr id="2" name="Imagen 1">
             <a:extLst>
               <a:ext uri="{FF2B5EF4-FFF2-40B4-BE49-F238E27FC236}">
-                <a16:creationId xmlns:a16="http://schemas.microsoft.com/office/drawing/2014/main" id="{5803BF33-0088-8801-3233-9B54DC32DFDA}"/>
+                <a16:creationId xmlns:a16="http://schemas.microsoft.com/office/drawing/2014/main" id="{6713CE8A-4E10-CF42-E036-77DD5D7BA7A8}"/>
               </a:ext>
             </a:extLst>
           </p:cNvPr>
@@ -7546,7 +7757,7 @@
         </p:blipFill>
         <p:spPr>
           <a:xfrm>
-            <a:off x="1106488" y="914940"/>
+            <a:off x="1143000" y="914940"/>
             <a:ext cx="6858000" cy="3456495"/>
           </a:xfrm>
           <a:prstGeom prst="rect">
@@ -7636,10 +7847,10 @@
       </p:sp>
       <p:pic>
         <p:nvPicPr>
-          <p:cNvPr id="3" name="Imagen 2">
+          <p:cNvPr id="4" name="Imagen 3">
             <a:extLst>
               <a:ext uri="{FF2B5EF4-FFF2-40B4-BE49-F238E27FC236}">
-                <a16:creationId xmlns:a16="http://schemas.microsoft.com/office/drawing/2014/main" id="{177BD724-2514-CABC-8FAB-6CA7BA2AE235}"/>
+                <a16:creationId xmlns:a16="http://schemas.microsoft.com/office/drawing/2014/main" id="{736028B5-D80B-7E67-D41C-78AFE24CC777}"/>
               </a:ext>
             </a:extLst>
           </p:cNvPr>
@@ -7656,38 +7867,8 @@
         </p:blipFill>
         <p:spPr>
           <a:xfrm>
-            <a:off x="981200" y="452438"/>
-            <a:ext cx="7058025" cy="2190750"/>
-          </a:xfrm>
-          <a:prstGeom prst="rect">
-            <a:avLst/>
-          </a:prstGeom>
-        </p:spPr>
-      </p:pic>
-      <p:pic>
-        <p:nvPicPr>
-          <p:cNvPr id="6" name="Imagen 5">
-            <a:extLst>
-              <a:ext uri="{FF2B5EF4-FFF2-40B4-BE49-F238E27FC236}">
-                <a16:creationId xmlns:a16="http://schemas.microsoft.com/office/drawing/2014/main" id="{E410BEA2-51AA-1C03-8F55-2E84A5FD91E7}"/>
-              </a:ext>
-            </a:extLst>
-          </p:cNvPr>
-          <p:cNvPicPr>
-            <a:picLocks noChangeAspect="1"/>
-          </p:cNvPicPr>
-          <p:nvPr/>
-        </p:nvPicPr>
-        <p:blipFill>
-          <a:blip r:embed="rId4"/>
-          <a:stretch>
-            <a:fillRect/>
-          </a:stretch>
-        </p:blipFill>
-        <p:spPr>
-          <a:xfrm>
-            <a:off x="0" y="2776221"/>
-            <a:ext cx="9144000" cy="2214853"/>
+            <a:off x="525462" y="1479712"/>
+            <a:ext cx="8020050" cy="2428875"/>
           </a:xfrm>
           <a:prstGeom prst="rect">
             <a:avLst/>
@@ -7708,6 +7889,116 @@
 </file>
 
 <file path=ppt/slides/slide6.xml><?xml version="1.0" encoding="utf-8"?>
+<p:sld xmlns:a="http://schemas.openxmlformats.org/drawingml/2006/main" xmlns:r="http://schemas.openxmlformats.org/officeDocument/2006/relationships" xmlns:p="http://schemas.openxmlformats.org/presentationml/2006/main">
+  <p:cSld>
+    <p:spTree>
+      <p:nvGrpSpPr>
+        <p:cNvPr id="1" name="">
+          <a:extLst>
+            <a:ext uri="{FF2B5EF4-FFF2-40B4-BE49-F238E27FC236}">
+              <a16:creationId xmlns:a16="http://schemas.microsoft.com/office/drawing/2014/main" id="{0852A819-FE5F-C52C-1985-3A071359C3C5}"/>
+            </a:ext>
+          </a:extLst>
+        </p:cNvPr>
+        <p:cNvGrpSpPr/>
+        <p:nvPr/>
+      </p:nvGrpSpPr>
+      <p:grpSpPr>
+        <a:xfrm>
+          <a:off x="0" y="0"/>
+          <a:ext cx="0" cy="0"/>
+          <a:chOff x="0" y="0"/>
+          <a:chExt cx="0" cy="0"/>
+        </a:xfrm>
+      </p:grpSpPr>
+      <p:sp>
+        <p:nvSpPr>
+          <p:cNvPr id="7" name="CuadroTexto 6">
+            <a:extLst>
+              <a:ext uri="{FF2B5EF4-FFF2-40B4-BE49-F238E27FC236}">
+                <a16:creationId xmlns:a16="http://schemas.microsoft.com/office/drawing/2014/main" id="{7594D0D0-A675-1A38-4147-8024A15036DC}"/>
+              </a:ext>
+            </a:extLst>
+          </p:cNvPr>
+          <p:cNvSpPr txBox="1"/>
+          <p:nvPr/>
+        </p:nvSpPr>
+        <p:spPr>
+          <a:xfrm>
+            <a:off x="908175" y="152426"/>
+            <a:ext cx="7254625" cy="369332"/>
+          </a:xfrm>
+          <a:prstGeom prst="rect">
+            <a:avLst/>
+          </a:prstGeom>
+          <a:noFill/>
+        </p:spPr>
+        <p:txBody>
+          <a:bodyPr wrap="square">
+            <a:spAutoFit/>
+          </a:bodyPr>
+          <a:lstStyle/>
+          <a:p>
+            <a:pPr algn="ctr">
+              <a:buNone/>
+            </a:pPr>
+            <a:r>
+              <a:rPr lang="es-MX" sz="1800" b="1" i="0" dirty="0">
+                <a:solidFill>
+                  <a:srgbClr val="000000"/>
+                </a:solidFill>
+                <a:effectLst/>
+                <a:latin typeface="Montserrat" pitchFamily="2" charset="0"/>
+              </a:rPr>
+              <a:t>Detalle de Notas en primeras planas</a:t>
+            </a:r>
+          </a:p>
+        </p:txBody>
+      </p:sp>
+      <p:pic>
+        <p:nvPicPr>
+          <p:cNvPr id="3" name="Imagen 2">
+            <a:extLst>
+              <a:ext uri="{FF2B5EF4-FFF2-40B4-BE49-F238E27FC236}">
+                <a16:creationId xmlns:a16="http://schemas.microsoft.com/office/drawing/2014/main" id="{A4A2FBA2-891C-D7A8-CC77-CD84E2C65512}"/>
+              </a:ext>
+            </a:extLst>
+          </p:cNvPr>
+          <p:cNvPicPr>
+            <a:picLocks noChangeAspect="1"/>
+          </p:cNvPicPr>
+          <p:nvPr/>
+        </p:nvPicPr>
+        <p:blipFill>
+          <a:blip r:embed="rId3"/>
+          <a:stretch>
+            <a:fillRect/>
+          </a:stretch>
+        </p:blipFill>
+        <p:spPr>
+          <a:xfrm>
+            <a:off x="0" y="1434846"/>
+            <a:ext cx="9144000" cy="2416683"/>
+          </a:xfrm>
+          <a:prstGeom prst="rect">
+            <a:avLst/>
+          </a:prstGeom>
+        </p:spPr>
+      </p:pic>
+    </p:spTree>
+    <p:extLst>
+      <p:ext uri="{BB962C8B-B14F-4D97-AF65-F5344CB8AC3E}">
+        <p14:creationId xmlns:p14="http://schemas.microsoft.com/office/powerpoint/2010/main" val="1555590401"/>
+      </p:ext>
+    </p:extLst>
+  </p:cSld>
+  <p:clrMapOvr>
+    <a:masterClrMapping/>
+  </p:clrMapOvr>
+</p:sld>
+</file>
+
+<file path=ppt/slides/slide7.xml><?xml version="1.0" encoding="utf-8"?>
 <p:sld xmlns:a="http://schemas.openxmlformats.org/drawingml/2006/main" xmlns:r="http://schemas.openxmlformats.org/officeDocument/2006/relationships" xmlns:p="http://schemas.openxmlformats.org/presentationml/2006/main">
   <p:cSld>
     <p:bg>
@@ -7778,36 +8069,44 @@
           </a:p>
         </p:txBody>
       </p:sp>
-      <p:pic>
-        <p:nvPicPr>
-          <p:cNvPr id="3" name="Imagen 2">
+      <p:sp>
+        <p:nvSpPr>
+          <p:cNvPr id="4" name="CuadroTexto 3">
             <a:extLst>
               <a:ext uri="{FF2B5EF4-FFF2-40B4-BE49-F238E27FC236}">
-                <a16:creationId xmlns:a16="http://schemas.microsoft.com/office/drawing/2014/main" id="{4246C00C-BFD0-2688-0411-BC76AAA51605}"/>
+                <a16:creationId xmlns:a16="http://schemas.microsoft.com/office/drawing/2014/main" id="{3137AB43-B467-D4CB-3AF2-B47A597BAF78}"/>
               </a:ext>
             </a:extLst>
           </p:cNvPr>
-          <p:cNvPicPr>
-            <a:picLocks noChangeAspect="1"/>
-          </p:cNvPicPr>
+          <p:cNvSpPr txBox="1"/>
           <p:nvPr/>
-        </p:nvPicPr>
-        <p:blipFill>
-          <a:blip r:embed="rId2"/>
-          <a:stretch>
-            <a:fillRect/>
-          </a:stretch>
-        </p:blipFill>
+        </p:nvSpPr>
         <p:spPr>
           <a:xfrm>
-            <a:off x="0" y="863279"/>
-            <a:ext cx="9144000" cy="3416942"/>
+            <a:off x="1353600" y="2217807"/>
+            <a:ext cx="6667200" cy="707886"/>
           </a:xfrm>
           <a:prstGeom prst="rect">
             <a:avLst/>
           </a:prstGeom>
+          <a:noFill/>
         </p:spPr>
-      </p:pic>
+        <p:txBody>
+          <a:bodyPr wrap="square" rtlCol="0">
+            <a:spAutoFit/>
+          </a:bodyPr>
+          <a:lstStyle/>
+          <a:p>
+            <a:pPr algn="ctr"/>
+            <a:r>
+              <a:rPr lang="es-MX" sz="2000" b="1" dirty="0">
+                <a:latin typeface="Montserrat" panose="00000500000000000000" pitchFamily="2" charset="0"/>
+              </a:rPr>
+              <a:t>No se registró información del gobernador en primeras planas</a:t>
+            </a:r>
+          </a:p>
+        </p:txBody>
+      </p:sp>
     </p:spTree>
     <p:extLst>
       <p:ext uri="{BB962C8B-B14F-4D97-AF65-F5344CB8AC3E}">
@@ -7821,7 +8120,7 @@
 </p:sld>
 </file>
 
-<file path=ppt/slides/slide7.xml><?xml version="1.0" encoding="utf-8"?>
+<file path=ppt/slides/slide8.xml><?xml version="1.0" encoding="utf-8"?>
 <p:sld xmlns:a="http://schemas.openxmlformats.org/drawingml/2006/main" xmlns:r="http://schemas.openxmlformats.org/officeDocument/2006/relationships" xmlns:p="http://schemas.openxmlformats.org/presentationml/2006/main">
   <p:cSld>
     <p:bg>
@@ -7943,7 +8242,7 @@
 </p:sld>
 </file>
 
-<file path=ppt/slides/slide8.xml><?xml version="1.0" encoding="utf-8"?>
+<file path=ppt/slides/slide9.xml><?xml version="1.0" encoding="utf-8"?>
 <p:sld xmlns:a="http://schemas.openxmlformats.org/drawingml/2006/main" xmlns:r="http://schemas.openxmlformats.org/officeDocument/2006/relationships" xmlns:p="http://schemas.openxmlformats.org/presentationml/2006/main">
   <p:cSld>
     <p:bg>
@@ -8056,132 +8355,6 @@
     <p:extLst>
       <p:ext uri="{BB962C8B-B14F-4D97-AF65-F5344CB8AC3E}">
         <p14:creationId xmlns:p14="http://schemas.microsoft.com/office/powerpoint/2010/main" val="3736623944"/>
-      </p:ext>
-    </p:extLst>
-  </p:cSld>
-  <p:clrMapOvr>
-    <a:masterClrMapping/>
-  </p:clrMapOvr>
-</p:sld>
-</file>
-
-<file path=ppt/slides/slide9.xml><?xml version="1.0" encoding="utf-8"?>
-<p:sld xmlns:a="http://schemas.openxmlformats.org/drawingml/2006/main" xmlns:r="http://schemas.openxmlformats.org/officeDocument/2006/relationships" xmlns:p="http://schemas.openxmlformats.org/presentationml/2006/main">
-  <p:cSld>
-    <p:bg>
-      <p:bgPr>
-        <a:solidFill>
-          <a:srgbClr val="FAFAFA"/>
-        </a:solidFill>
-        <a:effectLst/>
-      </p:bgPr>
-    </p:bg>
-    <p:spTree>
-      <p:nvGrpSpPr>
-        <p:cNvPr id="1" name="">
-          <a:extLst>
-            <a:ext uri="{FF2B5EF4-FFF2-40B4-BE49-F238E27FC236}">
-              <a16:creationId xmlns:a16="http://schemas.microsoft.com/office/drawing/2014/main" id="{93B6DC8C-E619-F67B-9048-4615CF198885}"/>
-            </a:ext>
-          </a:extLst>
-        </p:cNvPr>
-        <p:cNvGrpSpPr/>
-        <p:nvPr/>
-      </p:nvGrpSpPr>
-      <p:grpSpPr>
-        <a:xfrm>
-          <a:off x="0" y="0"/>
-          <a:ext cx="0" cy="0"/>
-          <a:chOff x="0" y="0"/>
-          <a:chExt cx="0" cy="0"/>
-        </a:xfrm>
-      </p:grpSpPr>
-      <p:sp>
-        <p:nvSpPr>
-          <p:cNvPr id="7" name="CuadroTexto 6">
-            <a:extLst>
-              <a:ext uri="{FF2B5EF4-FFF2-40B4-BE49-F238E27FC236}">
-                <a16:creationId xmlns:a16="http://schemas.microsoft.com/office/drawing/2014/main" id="{C46A5360-EC76-283F-42C4-C3D1585636DD}"/>
-              </a:ext>
-            </a:extLst>
-          </p:cNvPr>
-          <p:cNvSpPr txBox="1"/>
-          <p:nvPr/>
-        </p:nvSpPr>
-        <p:spPr>
-          <a:xfrm>
-            <a:off x="908175" y="152426"/>
-            <a:ext cx="7254625" cy="369332"/>
-          </a:xfrm>
-          <a:prstGeom prst="rect">
-            <a:avLst/>
-          </a:prstGeom>
-          <a:noFill/>
-        </p:spPr>
-        <p:txBody>
-          <a:bodyPr wrap="square">
-            <a:spAutoFit/>
-          </a:bodyPr>
-          <a:lstStyle/>
-          <a:p>
-            <a:pPr algn="ctr">
-              <a:buNone/>
-            </a:pPr>
-            <a:r>
-              <a:rPr lang="es-MX" sz="1800" b="1" i="0" dirty="0">
-                <a:solidFill>
-                  <a:srgbClr val="000000"/>
-                </a:solidFill>
-                <a:effectLst/>
-                <a:latin typeface="Montserrat" pitchFamily="2" charset="0"/>
-              </a:rPr>
-              <a:t>Detalle de Notas en primeras planas</a:t>
-            </a:r>
-          </a:p>
-        </p:txBody>
-      </p:sp>
-      <p:sp>
-        <p:nvSpPr>
-          <p:cNvPr id="6" name="CuadroTexto 5">
-            <a:extLst>
-              <a:ext uri="{FF2B5EF4-FFF2-40B4-BE49-F238E27FC236}">
-                <a16:creationId xmlns:a16="http://schemas.microsoft.com/office/drawing/2014/main" id="{16C89079-3408-10CE-4AB0-4A10750AB576}"/>
-              </a:ext>
-            </a:extLst>
-          </p:cNvPr>
-          <p:cNvSpPr txBox="1"/>
-          <p:nvPr/>
-        </p:nvSpPr>
-        <p:spPr>
-          <a:xfrm>
-            <a:off x="1360800" y="2289245"/>
-            <a:ext cx="6667200" cy="707886"/>
-          </a:xfrm>
-          <a:prstGeom prst="rect">
-            <a:avLst/>
-          </a:prstGeom>
-          <a:noFill/>
-        </p:spPr>
-        <p:txBody>
-          <a:bodyPr wrap="square" rtlCol="0">
-            <a:spAutoFit/>
-          </a:bodyPr>
-          <a:lstStyle/>
-          <a:p>
-            <a:pPr algn="ctr"/>
-            <a:r>
-              <a:rPr lang="es-MX" sz="2000" b="1" dirty="0">
-                <a:latin typeface="Montserrat" panose="00000500000000000000" pitchFamily="2" charset="0"/>
-              </a:rPr>
-              <a:t>No se registró información del gobernador en primeras planas</a:t>
-            </a:r>
-          </a:p>
-        </p:txBody>
-      </p:sp>
-    </p:spTree>
-    <p:extLst>
-      <p:ext uri="{BB962C8B-B14F-4D97-AF65-F5344CB8AC3E}">
-        <p14:creationId xmlns:p14="http://schemas.microsoft.com/office/powerpoint/2010/main" val="2442859157"/>
       </p:ext>
     </p:extLst>
   </p:cSld>

--- a/Reporte 191026.pptx
+++ b/Reporte 191026.pptx
@@ -6785,10 +6785,10 @@
       </p:sp>
       <p:pic>
         <p:nvPicPr>
-          <p:cNvPr id="5" name="Imagen 4">
+          <p:cNvPr id="4" name="Imagen 3">
             <a:extLst>
               <a:ext uri="{FF2B5EF4-FFF2-40B4-BE49-F238E27FC236}">
-                <a16:creationId xmlns:a16="http://schemas.microsoft.com/office/drawing/2014/main" id="{A09E2D55-FDCC-F3E2-08E8-A4EEE0A42E8E}"/>
+                <a16:creationId xmlns:a16="http://schemas.microsoft.com/office/drawing/2014/main" id="{D02D394B-757E-7B50-3BFF-7AD80DC35978}"/>
               </a:ext>
             </a:extLst>
           </p:cNvPr>
@@ -6805,8 +6805,8 @@
         </p:blipFill>
         <p:spPr>
           <a:xfrm>
-            <a:off x="0" y="941036"/>
-            <a:ext cx="9144000" cy="3404304"/>
+            <a:off x="0" y="943928"/>
+            <a:ext cx="9144000" cy="3398520"/>
           </a:xfrm>
           <a:prstGeom prst="rect">
             <a:avLst/>
@@ -6891,10 +6891,10 @@
       </p:sp>
       <p:pic>
         <p:nvPicPr>
-          <p:cNvPr id="4" name="Imagen 3">
+          <p:cNvPr id="3" name="Imagen 2">
             <a:extLst>
               <a:ext uri="{FF2B5EF4-FFF2-40B4-BE49-F238E27FC236}">
-                <a16:creationId xmlns:a16="http://schemas.microsoft.com/office/drawing/2014/main" id="{211DEC70-61ED-1251-A2C9-2FB99055F993}"/>
+                <a16:creationId xmlns:a16="http://schemas.microsoft.com/office/drawing/2014/main" id="{1BA63A79-634E-2134-21A9-4DCE88FDEA88}"/>
               </a:ext>
             </a:extLst>
           </p:cNvPr>
@@ -6911,8 +6911,8 @@
         </p:blipFill>
         <p:spPr>
           <a:xfrm>
-            <a:off x="0" y="1341965"/>
-            <a:ext cx="9144000" cy="2602445"/>
+            <a:off x="0" y="1308316"/>
+            <a:ext cx="9144000" cy="2669744"/>
           </a:xfrm>
           <a:prstGeom prst="rect">
             <a:avLst/>
@@ -6997,10 +6997,10 @@
       </p:sp>
       <p:pic>
         <p:nvPicPr>
-          <p:cNvPr id="5" name="Imagen 4">
+          <p:cNvPr id="4" name="Imagen 3">
             <a:extLst>
               <a:ext uri="{FF2B5EF4-FFF2-40B4-BE49-F238E27FC236}">
-                <a16:creationId xmlns:a16="http://schemas.microsoft.com/office/drawing/2014/main" id="{85175B98-4FA1-260D-36D8-AB8C47F3584A}"/>
+                <a16:creationId xmlns:a16="http://schemas.microsoft.com/office/drawing/2014/main" id="{7D12DDF7-F886-F08D-D5E8-014EE3CA5EAE}"/>
               </a:ext>
             </a:extLst>
           </p:cNvPr>
@@ -7017,8 +7017,8 @@
         </p:blipFill>
         <p:spPr>
           <a:xfrm>
-            <a:off x="0" y="696038"/>
-            <a:ext cx="9144000" cy="3894299"/>
+            <a:off x="0" y="736306"/>
+            <a:ext cx="9144000" cy="3813764"/>
           </a:xfrm>
           <a:prstGeom prst="rect">
             <a:avLst/>
@@ -7103,10 +7103,10 @@
       </p:sp>
       <p:pic>
         <p:nvPicPr>
-          <p:cNvPr id="4" name="Imagen 3">
+          <p:cNvPr id="3" name="Imagen 2">
             <a:extLst>
               <a:ext uri="{FF2B5EF4-FFF2-40B4-BE49-F238E27FC236}">
-                <a16:creationId xmlns:a16="http://schemas.microsoft.com/office/drawing/2014/main" id="{11562C22-A056-C48F-4EF0-405398D9F4B2}"/>
+                <a16:creationId xmlns:a16="http://schemas.microsoft.com/office/drawing/2014/main" id="{2F067AF5-2841-B53E-36AE-C836F31B00D3}"/>
               </a:ext>
             </a:extLst>
           </p:cNvPr>
@@ -7123,8 +7123,8 @@
         </p:blipFill>
         <p:spPr>
           <a:xfrm>
-            <a:off x="0" y="1394948"/>
-            <a:ext cx="9144000" cy="2353604"/>
+            <a:off x="0" y="1227808"/>
+            <a:ext cx="9144000" cy="2830760"/>
           </a:xfrm>
           <a:prstGeom prst="rect">
             <a:avLst/>
@@ -7215,10 +7215,10 @@
       </p:sp>
       <p:pic>
         <p:nvPicPr>
-          <p:cNvPr id="3" name="Imagen 2">
+          <p:cNvPr id="4" name="Imagen 3">
             <a:extLst>
               <a:ext uri="{FF2B5EF4-FFF2-40B4-BE49-F238E27FC236}">
-                <a16:creationId xmlns:a16="http://schemas.microsoft.com/office/drawing/2014/main" id="{781E828B-B7CC-7881-553B-5380FE6C4500}"/>
+                <a16:creationId xmlns:a16="http://schemas.microsoft.com/office/drawing/2014/main" id="{59052C75-45C7-F2B2-471A-EA7F89BA8692}"/>
               </a:ext>
             </a:extLst>
           </p:cNvPr>
@@ -7235,8 +7235,8 @@
         </p:blipFill>
         <p:spPr>
           <a:xfrm>
-            <a:off x="0" y="490148"/>
-            <a:ext cx="9144000" cy="4163204"/>
+            <a:off x="-6725" y="1580575"/>
+            <a:ext cx="9144000" cy="2125226"/>
           </a:xfrm>
           <a:prstGeom prst="rect">
             <a:avLst/>
@@ -7325,44 +7325,36 @@
           </a:p>
         </p:txBody>
       </p:sp>
-      <p:sp>
-        <p:nvSpPr>
-          <p:cNvPr id="2" name="CuadroTexto 1">
+      <p:pic>
+        <p:nvPicPr>
+          <p:cNvPr id="4" name="Imagen 3">
             <a:extLst>
               <a:ext uri="{FF2B5EF4-FFF2-40B4-BE49-F238E27FC236}">
-                <a16:creationId xmlns:a16="http://schemas.microsoft.com/office/drawing/2014/main" id="{DD2C67BE-35FC-F967-D072-5BB8DF554D19}"/>
+                <a16:creationId xmlns:a16="http://schemas.microsoft.com/office/drawing/2014/main" id="{DC481D56-6AE3-6B79-3F51-18E8568BB002}"/>
               </a:ext>
             </a:extLst>
           </p:cNvPr>
-          <p:cNvSpPr txBox="1"/>
+          <p:cNvPicPr>
+            <a:picLocks noChangeAspect="1"/>
+          </p:cNvPicPr>
           <p:nvPr/>
-        </p:nvSpPr>
+        </p:nvPicPr>
+        <p:blipFill>
+          <a:blip r:embed="rId2"/>
+          <a:stretch>
+            <a:fillRect/>
+          </a:stretch>
+        </p:blipFill>
         <p:spPr>
           <a:xfrm>
-            <a:off x="907200" y="2166134"/>
-            <a:ext cx="7516800" cy="954107"/>
+            <a:off x="1824036" y="395912"/>
+            <a:ext cx="5495925" cy="4638675"/>
           </a:xfrm>
           <a:prstGeom prst="rect">
             <a:avLst/>
           </a:prstGeom>
-          <a:noFill/>
         </p:spPr>
-        <p:txBody>
-          <a:bodyPr wrap="square" rtlCol="0">
-            <a:spAutoFit/>
-          </a:bodyPr>
-          <a:lstStyle/>
-          <a:p>
-            <a:pPr algn="ctr"/>
-            <a:r>
-              <a:rPr lang="es-MX" sz="2800" b="1" dirty="0">
-                <a:latin typeface="Montserrat" panose="00000500000000000000" pitchFamily="2" charset="0"/>
-              </a:rPr>
-              <a:t>No se registró información emitida por radioescuchas</a:t>
-            </a:r>
-          </a:p>
-        </p:txBody>
-      </p:sp>
+      </p:pic>
     </p:spTree>
     <p:extLst>
       <p:ext uri="{BB962C8B-B14F-4D97-AF65-F5344CB8AC3E}">
